--- a/~sasano/lecture/fpl/26/fpl5ans.pptx
+++ b/~sasano/lecture/fpl/26/fpl5ans.pptx
@@ -217,7 +217,7 @@
             <a:fld id="{2A1D0DAA-63F4-43D0-882A-891F9A495018}" type="datetimeFigureOut">
               <a:rPr kumimoji="1" lang="ja-JP" altLang="en-US" smtClean="0"/>
               <a:pPr/>
-              <a:t>2021/9/29</a:t>
+              <a:t>2026/9/30</a:t>
             </a:fld>
             <a:endParaRPr kumimoji="1" lang="ja-JP" altLang="en-US"/>
           </a:p>
@@ -1467,7 +1467,7 @@
             <a:fld id="{E90ED720-0104-4369-84BC-D37694168613}" type="datetimeFigureOut">
               <a:rPr kumimoji="1" lang="ja-JP" altLang="en-US" smtClean="0"/>
               <a:pPr/>
-              <a:t>2021/9/29</a:t>
+              <a:t>2026/9/30</a:t>
             </a:fld>
             <a:endParaRPr kumimoji="1" lang="ja-JP" altLang="en-US"/>
           </a:p>
@@ -1664,7 +1664,7 @@
             <a:fld id="{E90ED720-0104-4369-84BC-D37694168613}" type="datetimeFigureOut">
               <a:rPr kumimoji="1" lang="ja-JP" altLang="en-US" smtClean="0"/>
               <a:pPr/>
-              <a:t>2021/9/29</a:t>
+              <a:t>2026/9/30</a:t>
             </a:fld>
             <a:endParaRPr kumimoji="1" lang="ja-JP" altLang="en-US"/>
           </a:p>
@@ -1871,7 +1871,7 @@
             <a:fld id="{E90ED720-0104-4369-84BC-D37694168613}" type="datetimeFigureOut">
               <a:rPr kumimoji="1" lang="ja-JP" altLang="en-US" smtClean="0"/>
               <a:pPr/>
-              <a:t>2021/9/29</a:t>
+              <a:t>2026/9/30</a:t>
             </a:fld>
             <a:endParaRPr kumimoji="1" lang="ja-JP" altLang="en-US"/>
           </a:p>
@@ -2068,7 +2068,7 @@
             <a:fld id="{E90ED720-0104-4369-84BC-D37694168613}" type="datetimeFigureOut">
               <a:rPr kumimoji="1" lang="ja-JP" altLang="en-US" smtClean="0"/>
               <a:pPr/>
-              <a:t>2021/9/29</a:t>
+              <a:t>2026/9/30</a:t>
             </a:fld>
             <a:endParaRPr kumimoji="1" lang="ja-JP" altLang="en-US"/>
           </a:p>
@@ -2310,7 +2310,7 @@
             <a:fld id="{E90ED720-0104-4369-84BC-D37694168613}" type="datetimeFigureOut">
               <a:rPr kumimoji="1" lang="ja-JP" altLang="en-US" smtClean="0"/>
               <a:pPr/>
-              <a:t>2021/9/29</a:t>
+              <a:t>2026/9/30</a:t>
             </a:fld>
             <a:endParaRPr kumimoji="1" lang="ja-JP" altLang="en-US"/>
           </a:p>
@@ -2656,7 +2656,7 @@
             <a:fld id="{E90ED720-0104-4369-84BC-D37694168613}" type="datetimeFigureOut">
               <a:rPr kumimoji="1" lang="ja-JP" altLang="en-US" smtClean="0"/>
               <a:pPr/>
-              <a:t>2021/9/29</a:t>
+              <a:t>2026/9/30</a:t>
             </a:fld>
             <a:endParaRPr kumimoji="1" lang="ja-JP" altLang="en-US"/>
           </a:p>
@@ -3136,7 +3136,7 @@
             <a:fld id="{E90ED720-0104-4369-84BC-D37694168613}" type="datetimeFigureOut">
               <a:rPr kumimoji="1" lang="ja-JP" altLang="en-US" smtClean="0"/>
               <a:pPr/>
-              <a:t>2021/9/29</a:t>
+              <a:t>2026/9/30</a:t>
             </a:fld>
             <a:endParaRPr kumimoji="1" lang="ja-JP" altLang="en-US"/>
           </a:p>
@@ -3250,7 +3250,7 @@
             <a:fld id="{E90ED720-0104-4369-84BC-D37694168613}" type="datetimeFigureOut">
               <a:rPr kumimoji="1" lang="ja-JP" altLang="en-US" smtClean="0"/>
               <a:pPr/>
-              <a:t>2021/9/29</a:t>
+              <a:t>2026/9/30</a:t>
             </a:fld>
             <a:endParaRPr kumimoji="1" lang="ja-JP" altLang="en-US"/>
           </a:p>
@@ -3342,7 +3342,7 @@
             <a:fld id="{E90ED720-0104-4369-84BC-D37694168613}" type="datetimeFigureOut">
               <a:rPr kumimoji="1" lang="ja-JP" altLang="en-US" smtClean="0"/>
               <a:pPr/>
-              <a:t>2021/9/29</a:t>
+              <a:t>2026/9/30</a:t>
             </a:fld>
             <a:endParaRPr kumimoji="1" lang="ja-JP" altLang="en-US"/>
           </a:p>
@@ -3646,7 +3646,7 @@
             <a:fld id="{E90ED720-0104-4369-84BC-D37694168613}" type="datetimeFigureOut">
               <a:rPr kumimoji="1" lang="ja-JP" altLang="en-US" smtClean="0"/>
               <a:pPr/>
-              <a:t>2021/9/29</a:t>
+              <a:t>2026/9/30</a:t>
             </a:fld>
             <a:endParaRPr kumimoji="1" lang="ja-JP" altLang="en-US"/>
           </a:p>
@@ -3895,7 +3895,7 @@
             <a:fld id="{E90ED720-0104-4369-84BC-D37694168613}" type="datetimeFigureOut">
               <a:rPr kumimoji="1" lang="ja-JP" altLang="en-US" smtClean="0"/>
               <a:pPr/>
-              <a:t>2021/9/29</a:t>
+              <a:t>2026/9/30</a:t>
             </a:fld>
             <a:endParaRPr kumimoji="1" lang="ja-JP" altLang="en-US"/>
           </a:p>
@@ -4135,7 +4135,7 @@
             <a:fld id="{E90ED720-0104-4369-84BC-D37694168613}" type="datetimeFigureOut">
               <a:rPr kumimoji="1" lang="ja-JP" altLang="en-US" smtClean="0"/>
               <a:pPr/>
-              <a:t>2021/9/29</a:t>
+              <a:t>2026/9/30</a:t>
             </a:fld>
             <a:endParaRPr kumimoji="1" lang="ja-JP" altLang="en-US"/>
           </a:p>
@@ -4589,56 +4589,6 @@
                 <a:schemeClr val="tx1"/>
               </a:solidFill>
             </a:endParaRPr>
-          </a:p>
-        </p:txBody>
-      </p:sp>
-      <p:sp>
-        <p:nvSpPr>
-          <p:cNvPr id="6" name="テキスト ボックス 5"/>
-          <p:cNvSpPr txBox="1"/>
-          <p:nvPr/>
-        </p:nvSpPr>
-        <p:spPr>
-          <a:xfrm>
-            <a:off x="755576" y="4365104"/>
-            <a:ext cx="7776863" cy="1077218"/>
-          </a:xfrm>
-          <a:prstGeom prst="rect">
-            <a:avLst/>
-          </a:prstGeom>
-          <a:noFill/>
-        </p:spPr>
-        <p:txBody>
-          <a:bodyPr wrap="square" rtlCol="0">
-            <a:spAutoFit/>
-          </a:bodyPr>
-          <a:lstStyle/>
-          <a:p>
-            <a:pPr algn="ctr"/>
-            <a:r>
-              <a:rPr kumimoji="1" lang="en-US" altLang="ja-JP" sz="3200" dirty="0"/>
-              <a:t>Department of </a:t>
-            </a:r>
-          </a:p>
-          <a:p>
-            <a:pPr algn="ctr"/>
-            <a:r>
-              <a:rPr lang="en-US" altLang="ja-JP" sz="3200" dirty="0"/>
-              <a:t>Computer</a:t>
-            </a:r>
-            <a:r>
-              <a:rPr kumimoji="1" lang="en-US" altLang="ja-JP" sz="3200" dirty="0"/>
-              <a:t> Science and </a:t>
-            </a:r>
-            <a:r>
-              <a:rPr lang="en-US" altLang="ja-JP" sz="3200" dirty="0"/>
-              <a:t>Engineering</a:t>
-            </a:r>
-            <a:r>
-              <a:rPr kumimoji="1" lang="en-US" altLang="ja-JP" sz="3200" dirty="0"/>
-              <a:t> </a:t>
-            </a:r>
-            <a:endParaRPr kumimoji="1" lang="ja-JP" altLang="en-US" sz="3200" dirty="0"/>
           </a:p>
         </p:txBody>
       </p:sp>
